--- a/samples/gold-btc-comparison/artifacts/gold_btc_comparison_pptx_v1.pptx
+++ b/samples/gold-btc-comparison/artifacts/gold_btc_comparison_pptx_v1.pptx
@@ -3408,7 +3408,7 @@
                 <a:latin typeface="Helvetica Neue"/>
                 <a:ea typeface="PingFang SC"/>
               </a:rPr>
-              <a:t>ev-s-20260705-745a-2［computation］evidence:ev-s-20260705-745a-1（2026-07-05T08:16:14+00:00）</a:t>
+              <a:t>ev-s-20260705-745a-2［computation］evidence:ev-s-20260705-745a-39（2026-07-05T08:16:14+00:00）</a:t>
             </a:r>
           </a:p>
           <a:p>
@@ -4602,6 +4602,26 @@
               <a:t>ev-s-20260705-745a-38［search］https://www.nytimes.com/2021/09/24/business/china-cryptocurrency-bitcoin.html（2026-07-05T08:22:01+00:00）</a:t>
             </a:r>
           </a:p>
+          <a:p>
+            <a:pPr algn="l">
+              <a:lnSpc>
+                <a:spcPct val="110000"/>
+              </a:lnSpc>
+              <a:spcAft>
+                <a:spcPts val="600"/>
+              </a:spcAft>
+            </a:pPr>
+            <a:r>
+              <a:rPr sz="1050" b="0">
+                <a:solidFill>
+                  <a:srgbClr val="5B6B81"/>
+                </a:solidFill>
+                <a:latin typeface="Helvetica Neue"/>
+                <a:ea typeface="PingFang SC"/>
+              </a:rPr>
+              <a:t>ev-s-20260705-745a-39［market_data］https://query2.finance.yahoo.com/v8/finance/chart/BTC-USD?period1=1625443200&amp;period2=1783296000&amp;interval=1d&amp;events=history（2026-07-05T08:16:06+00:00）</a:t>
+            </a:r>
+          </a:p>
         </p:txBody>
       </p:sp>
       <p:sp>
@@ -4769,7 +4789,7 @@
                 <a:latin typeface="Helvetica Neue"/>
                 <a:ea typeface="PingFang SC"/>
               </a:rPr>
-              <a:t>溯源：ev-s-20260705-745a-1  ｜  框架说明：从地缘危机反应、金融系统性危机反应、通胀对冲有效性、宏观紧缩耐受度四个子维度评估两资产避险特征。</a:t>
+              <a:t>溯源：ev-s-20260705-745a-1、ev-s-20260705-745a-39  ｜  框架说明：从地缘危机反应、金融系统性危机反应、通胀对冲有效性、宏观紧缩耐受度四个子维度评估两资产避险特征。</a:t>
             </a:r>
           </a:p>
         </p:txBody>
@@ -6303,7 +6323,7 @@
                 <a:latin typeface="Helvetica Neue"/>
                 <a:ea typeface="PingFang SC"/>
               </a:rPr>
-              <a:t>溯源：ev-s-20260705-745a-1、ev-s-20260705-745a-2、ev-s-20260705-745a-3  ｜  波动率与最大回撤为五年区间近似值，精确数值见xlsx回测底稿。评判基于定性+定量综合判断。</a:t>
+              <a:t>溯源：ev-s-20260705-745a-1、ev-s-20260705-745a-2、ev-s-20260705-745a-3、ev-s-20260705-745a-39  ｜  波动率与最大回撤为五年区间近似值，精确数值见xlsx回测底稿。评判基于定性+定量综合判断。</a:t>
             </a:r>
           </a:p>
         </p:txBody>
@@ -7889,7 +7909,7 @@
                 <a:latin typeface="Helvetica Neue"/>
                 <a:ea typeface="PingFang SC"/>
               </a:rPr>
-              <a:t>溯源：ev-s-20260705-745a-1</a:t>
+              <a:t>溯源：ev-s-20260705-745a-1、ev-s-20260705-745a-39</a:t>
             </a:r>
           </a:p>
         </p:txBody>
@@ -8170,7 +8190,7 @@
                 <a:latin typeface="Helvetica Neue"/>
                 <a:ea typeface="PingFang SC"/>
               </a:rPr>
-              <a:t>溯源：ev-s-20260705-745a-1、ev-s-20260705-745a-2、ev-s-20260705-745a-3  ｜  完整溯源清单见末页。详细回测数据见xlsx-backtest产物。建议上游补充2024年8月日元套息交易平仓事件及2026Q1黄金极端行情相关事件。</a:t>
+              <a:t>溯源：ev-s-20260705-745a-1、ev-s-20260705-745a-2、ev-s-20260705-745a-3、ev-s-20260705-745a-39  ｜  完整溯源清单见末页。详细回测数据见xlsx-backtest产物。建议上游补充2024年8月日元套息交易平仓事件及2026Q1黄金极端行情相关事件。</a:t>
             </a:r>
           </a:p>
         </p:txBody>

--- a/samples/gold-btc-comparison/artifacts/gold_btc_comparison_pptx_v1.pptx
+++ b/samples/gold-btc-comparison/artifacts/gold_btc_comparison_pptx_v1.pptx
@@ -3372,7 +3372,7 @@
           </a:bodyPr>
           <a:lstStyle/>
           <a:p>
-            <a:pPr algn="l">
+            <a:pPr>
               <a:lnSpc>
                 <a:spcPct val="110000"/>
               </a:lnSpc>
@@ -3388,11 +3388,32 @@
                 <a:latin typeface="Helvetica Neue"/>
                 <a:ea typeface="PingFang SC"/>
               </a:rPr>
-              <a:t>ev-s-20260705-745a-1［market_data］https://query2.finance.yahoo.com/v8/finance/chart/GC=F?period1=1625443200&amp;period2=1783296000&amp;interval=1d&amp;events=history（2026-07-05T08:16:06+00:00）</a:t>
-            </a:r>
-          </a:p>
-          <a:p>
-            <a:pPr algn="l">
+              <a:t>ev-s-20260705-745a-1［market_data］</a:t>
+            </a:r>
+            <a:r>
+              <a:rPr sz="1050" b="0">
+                <a:solidFill>
+                  <a:srgbClr val="2A63E8"/>
+                </a:solidFill>
+                <a:latin typeface="Helvetica Neue"/>
+                <a:hlinkClick r:id="rId2"/>
+                <a:ea typeface="PingFang SC"/>
+              </a:rPr>
+              <a:t>https://query2.finance.yahoo.com/v8/finance/chart/GC=F?period1=1625443200&amp;period2=1783296000&amp;interval=1d&amp;events=history</a:t>
+            </a:r>
+            <a:r>
+              <a:rPr sz="1050" b="0">
+                <a:solidFill>
+                  <a:srgbClr val="5B6B81"/>
+                </a:solidFill>
+                <a:latin typeface="Helvetica Neue"/>
+                <a:ea typeface="PingFang SC"/>
+              </a:rPr>
+              <a:t>（2026-07-05T08:16:06+00:00）</a:t>
+            </a:r>
+          </a:p>
+          <a:p>
+            <a:pPr>
               <a:lnSpc>
                 <a:spcPct val="110000"/>
               </a:lnSpc>
@@ -3408,11 +3429,31 @@
                 <a:latin typeface="Helvetica Neue"/>
                 <a:ea typeface="PingFang SC"/>
               </a:rPr>
-              <a:t>ev-s-20260705-745a-2［computation］evidence:ev-s-20260705-745a-39（2026-07-05T08:16:14+00:00）</a:t>
-            </a:r>
-          </a:p>
-          <a:p>
-            <a:pPr algn="l">
+              <a:t>ev-s-20260705-745a-2［computation］</a:t>
+            </a:r>
+            <a:r>
+              <a:rPr sz="1050" b="0">
+                <a:solidFill>
+                  <a:srgbClr val="5B6B81"/>
+                </a:solidFill>
+                <a:latin typeface="Helvetica Neue"/>
+                <a:ea typeface="PingFang SC"/>
+              </a:rPr>
+              <a:t>evidence:ev-s-20260705-745a-39</a:t>
+            </a:r>
+            <a:r>
+              <a:rPr sz="1050" b="0">
+                <a:solidFill>
+                  <a:srgbClr val="5B6B81"/>
+                </a:solidFill>
+                <a:latin typeface="Helvetica Neue"/>
+                <a:ea typeface="PingFang SC"/>
+              </a:rPr>
+              <a:t>（2026-07-05T08:16:14+00:00）</a:t>
+            </a:r>
+          </a:p>
+          <a:p>
+            <a:pPr>
               <a:lnSpc>
                 <a:spcPct val="110000"/>
               </a:lnSpc>
@@ -3428,11 +3469,31 @@
                 <a:latin typeface="Helvetica Neue"/>
                 <a:ea typeface="PingFang SC"/>
               </a:rPr>
-              <a:t>ev-s-20260705-745a-3［computation］evidence:ev-s-20260705-745a-1（2026-07-05T08:16:14+00:00）</a:t>
-            </a:r>
-          </a:p>
-          <a:p>
-            <a:pPr algn="l">
+              <a:t>ev-s-20260705-745a-3［computation］</a:t>
+            </a:r>
+            <a:r>
+              <a:rPr sz="1050" b="0">
+                <a:solidFill>
+                  <a:srgbClr val="5B6B81"/>
+                </a:solidFill>
+                <a:latin typeface="Helvetica Neue"/>
+                <a:ea typeface="PingFang SC"/>
+              </a:rPr>
+              <a:t>evidence:ev-s-20260705-745a-1</a:t>
+            </a:r>
+            <a:r>
+              <a:rPr sz="1050" b="0">
+                <a:solidFill>
+                  <a:srgbClr val="5B6B81"/>
+                </a:solidFill>
+                <a:latin typeface="Helvetica Neue"/>
+                <a:ea typeface="PingFang SC"/>
+              </a:rPr>
+              <a:t>（2026-07-05T08:16:14+00:00）</a:t>
+            </a:r>
+          </a:p>
+          <a:p>
+            <a:pPr>
               <a:lnSpc>
                 <a:spcPct val="110000"/>
               </a:lnSpc>
@@ -3448,11 +3509,32 @@
                 <a:latin typeface="Helvetica Neue"/>
                 <a:ea typeface="PingFang SC"/>
               </a:rPr>
-              <a:t>ev-s-20260705-745a-4［search］https://tokentax.co/blog/ftx-collapse（2026-07-05T08:18:20+00:00）</a:t>
-            </a:r>
-          </a:p>
-          <a:p>
-            <a:pPr algn="l">
+              <a:t>ev-s-20260705-745a-4［search］</a:t>
+            </a:r>
+            <a:r>
+              <a:rPr sz="1050" b="0">
+                <a:solidFill>
+                  <a:srgbClr val="2A63E8"/>
+                </a:solidFill>
+                <a:latin typeface="Helvetica Neue"/>
+                <a:hlinkClick r:id="rId3"/>
+                <a:ea typeface="PingFang SC"/>
+              </a:rPr>
+              <a:t>https://tokentax.co/blog/ftx-collapse</a:t>
+            </a:r>
+            <a:r>
+              <a:rPr sz="1050" b="0">
+                <a:solidFill>
+                  <a:srgbClr val="5B6B81"/>
+                </a:solidFill>
+                <a:latin typeface="Helvetica Neue"/>
+                <a:ea typeface="PingFang SC"/>
+              </a:rPr>
+              <a:t>（2026-07-05T08:18:20+00:00）</a:t>
+            </a:r>
+          </a:p>
+          <a:p>
+            <a:pPr>
               <a:lnSpc>
                 <a:spcPct val="110000"/>
               </a:lnSpc>
@@ -3468,11 +3550,32 @@
                 <a:latin typeface="Helvetica Neue"/>
                 <a:ea typeface="PingFang SC"/>
               </a:rPr>
-              <a:t>ev-s-20260705-745a-5［search］https://www.history.com/this-day-in-history/november-30/chatgpt-released-openai（2026-07-05T08:18:21+00:00）</a:t>
-            </a:r>
-          </a:p>
-          <a:p>
-            <a:pPr algn="l">
+              <a:t>ev-s-20260705-745a-5［search］</a:t>
+            </a:r>
+            <a:r>
+              <a:rPr sz="1050" b="0">
+                <a:solidFill>
+                  <a:srgbClr val="2A63E8"/>
+                </a:solidFill>
+                <a:latin typeface="Helvetica Neue"/>
+                <a:hlinkClick r:id="rId4"/>
+                <a:ea typeface="PingFang SC"/>
+              </a:rPr>
+              <a:t>https://www.history.com/this-day-in-history/november-30/chatgpt-released-openai</a:t>
+            </a:r>
+            <a:r>
+              <a:rPr sz="1050" b="0">
+                <a:solidFill>
+                  <a:srgbClr val="5B6B81"/>
+                </a:solidFill>
+                <a:latin typeface="Helvetica Neue"/>
+                <a:ea typeface="PingFang SC"/>
+              </a:rPr>
+              <a:t>（2026-07-05T08:18:21+00:00）</a:t>
+            </a:r>
+          </a:p>
+          <a:p>
+            <a:pPr>
               <a:lnSpc>
                 <a:spcPct val="110000"/>
               </a:lnSpc>
@@ -3488,11 +3591,32 @@
                 <a:latin typeface="Helvetica Neue"/>
                 <a:ea typeface="PingFang SC"/>
               </a:rPr>
-              <a:t>ev-s-20260705-745a-6［search］https://en.wikipedia.org/wiki/Collapse_of_Silicon_Valley_Bank（2026-07-05T08:18:21+00:00）</a:t>
-            </a:r>
-          </a:p>
-          <a:p>
-            <a:pPr algn="l">
+              <a:t>ev-s-20260705-745a-6［search］</a:t>
+            </a:r>
+            <a:r>
+              <a:rPr sz="1050" b="0">
+                <a:solidFill>
+                  <a:srgbClr val="2A63E8"/>
+                </a:solidFill>
+                <a:latin typeface="Helvetica Neue"/>
+                <a:hlinkClick r:id="rId5"/>
+                <a:ea typeface="PingFang SC"/>
+              </a:rPr>
+              <a:t>https://en.wikipedia.org/wiki/Collapse_of_Silicon_Valley_Bank</a:t>
+            </a:r>
+            <a:r>
+              <a:rPr sz="1050" b="0">
+                <a:solidFill>
+                  <a:srgbClr val="5B6B81"/>
+                </a:solidFill>
+                <a:latin typeface="Helvetica Neue"/>
+                <a:ea typeface="PingFang SC"/>
+              </a:rPr>
+              <a:t>（2026-07-05T08:18:21+00:00）</a:t>
+            </a:r>
+          </a:p>
+          <a:p>
+            <a:pPr>
               <a:lnSpc>
                 <a:spcPct val="110000"/>
               </a:lnSpc>
@@ -3508,11 +3632,32 @@
                 <a:latin typeface="Helvetica Neue"/>
                 <a:ea typeface="PingFang SC"/>
               </a:rPr>
-              <a:t>ev-s-20260705-745a-7［search］https://en.wikipedia.org/wiki/DeepSeek（2026-07-05T08:18:29+00:00）</a:t>
-            </a:r>
-          </a:p>
-          <a:p>
-            <a:pPr algn="l">
+              <a:t>ev-s-20260705-745a-7［search］</a:t>
+            </a:r>
+            <a:r>
+              <a:rPr sz="1050" b="0">
+                <a:solidFill>
+                  <a:srgbClr val="2A63E8"/>
+                </a:solidFill>
+                <a:latin typeface="Helvetica Neue"/>
+                <a:hlinkClick r:id="rId6"/>
+                <a:ea typeface="PingFang SC"/>
+              </a:rPr>
+              <a:t>https://en.wikipedia.org/wiki/DeepSeek</a:t>
+            </a:r>
+            <a:r>
+              <a:rPr sz="1050" b="0">
+                <a:solidFill>
+                  <a:srgbClr val="5B6B81"/>
+                </a:solidFill>
+                <a:latin typeface="Helvetica Neue"/>
+                <a:ea typeface="PingFang SC"/>
+              </a:rPr>
+              <a:t>（2026-07-05T08:18:29+00:00）</a:t>
+            </a:r>
+          </a:p>
+          <a:p>
+            <a:pPr>
               <a:lnSpc>
                 <a:spcPct val="110000"/>
               </a:lnSpc>
@@ -3528,11 +3673,32 @@
                 <a:latin typeface="Helvetica Neue"/>
                 <a:ea typeface="PingFang SC"/>
               </a:rPr>
-              <a:t>ev-s-20260705-745a-8［search］https://www.lseg.com/en/ftse-russell/research/bitcoin-halving（2026-07-05T08:18:36+00:00）</a:t>
-            </a:r>
-          </a:p>
-          <a:p>
-            <a:pPr algn="l">
+              <a:t>ev-s-20260705-745a-8［search］</a:t>
+            </a:r>
+            <a:r>
+              <a:rPr sz="1050" b="0">
+                <a:solidFill>
+                  <a:srgbClr val="2A63E8"/>
+                </a:solidFill>
+                <a:latin typeface="Helvetica Neue"/>
+                <a:hlinkClick r:id="rId7"/>
+                <a:ea typeface="PingFang SC"/>
+              </a:rPr>
+              <a:t>https://www.lseg.com/en/ftse-russell/research/bitcoin-halving</a:t>
+            </a:r>
+            <a:r>
+              <a:rPr sz="1050" b="0">
+                <a:solidFill>
+                  <a:srgbClr val="5B6B81"/>
+                </a:solidFill>
+                <a:latin typeface="Helvetica Neue"/>
+                <a:ea typeface="PingFang SC"/>
+              </a:rPr>
+              <a:t>（2026-07-05T08:18:36+00:00）</a:t>
+            </a:r>
+          </a:p>
+          <a:p>
+            <a:pPr>
               <a:lnSpc>
                 <a:spcPct val="110000"/>
               </a:lnSpc>
@@ -3548,11 +3714,32 @@
                 <a:latin typeface="Helvetica Neue"/>
                 <a:ea typeface="PingFang SC"/>
               </a:rPr>
-              <a:t>ev-s-20260705-745a-9［search］https://bitbo.io/calendar/etfs（2026-07-05T08:18:37+00:00）</a:t>
-            </a:r>
-          </a:p>
-          <a:p>
-            <a:pPr algn="l">
+              <a:t>ev-s-20260705-745a-9［search］</a:t>
+            </a:r>
+            <a:r>
+              <a:rPr sz="1050" b="0">
+                <a:solidFill>
+                  <a:srgbClr val="2A63E8"/>
+                </a:solidFill>
+                <a:latin typeface="Helvetica Neue"/>
+                <a:hlinkClick r:id="rId8"/>
+                <a:ea typeface="PingFang SC"/>
+              </a:rPr>
+              <a:t>https://bitbo.io/calendar/etfs</a:t>
+            </a:r>
+            <a:r>
+              <a:rPr sz="1050" b="0">
+                <a:solidFill>
+                  <a:srgbClr val="5B6B81"/>
+                </a:solidFill>
+                <a:latin typeface="Helvetica Neue"/>
+                <a:ea typeface="PingFang SC"/>
+              </a:rPr>
+              <a:t>（2026-07-05T08:18:37+00:00）</a:t>
+            </a:r>
+          </a:p>
+          <a:p>
+            <a:pPr>
               <a:lnSpc>
                 <a:spcPct val="110000"/>
               </a:lnSpc>
@@ -3568,11 +3755,32 @@
                 <a:latin typeface="Helvetica Neue"/>
                 <a:ea typeface="PingFang SC"/>
               </a:rPr>
-              <a:t>ev-s-20260705-745a-10［search］https://www.klgates.com/President-Trump-Announces-Reciprocal-Tariffs-Beginning-5-April-2025-4-2-2025（2026-07-05T08:18:37+00:00）</a:t>
-            </a:r>
-          </a:p>
-          <a:p>
-            <a:pPr algn="l">
+              <a:t>ev-s-20260705-745a-10［search］</a:t>
+            </a:r>
+            <a:r>
+              <a:rPr sz="1050" b="0">
+                <a:solidFill>
+                  <a:srgbClr val="2A63E8"/>
+                </a:solidFill>
+                <a:latin typeface="Helvetica Neue"/>
+                <a:hlinkClick r:id="rId9"/>
+                <a:ea typeface="PingFang SC"/>
+              </a:rPr>
+              <a:t>https://www.klgates.com/President-Trump-Announces-Reciprocal-Tariffs-Beginning-5-April-2025-4-2-2025</a:t>
+            </a:r>
+            <a:r>
+              <a:rPr sz="1050" b="0">
+                <a:solidFill>
+                  <a:srgbClr val="5B6B81"/>
+                </a:solidFill>
+                <a:latin typeface="Helvetica Neue"/>
+                <a:ea typeface="PingFang SC"/>
+              </a:rPr>
+              <a:t>（2026-07-05T08:18:37+00:00）</a:t>
+            </a:r>
+          </a:p>
+          <a:p>
+            <a:pPr>
               <a:lnSpc>
                 <a:spcPct val="110000"/>
               </a:lnSpc>
@@ -3588,11 +3796,32 @@
                 <a:latin typeface="Helvetica Neue"/>
                 <a:ea typeface="PingFang SC"/>
               </a:rPr>
-              <a:t>ev-s-20260705-745a-11［search］https://www.huri.harvard.edu/russo-ukrainian-war（2026-07-05T08:18:37+00:00）</a:t>
-            </a:r>
-          </a:p>
-          <a:p>
-            <a:pPr algn="l">
+              <a:t>ev-s-20260705-745a-11［search］</a:t>
+            </a:r>
+            <a:r>
+              <a:rPr sz="1050" b="0">
+                <a:solidFill>
+                  <a:srgbClr val="2A63E8"/>
+                </a:solidFill>
+                <a:latin typeface="Helvetica Neue"/>
+                <a:hlinkClick r:id="rId10"/>
+                <a:ea typeface="PingFang SC"/>
+              </a:rPr>
+              <a:t>https://www.huri.harvard.edu/russo-ukrainian-war</a:t>
+            </a:r>
+            <a:r>
+              <a:rPr sz="1050" b="0">
+                <a:solidFill>
+                  <a:srgbClr val="5B6B81"/>
+                </a:solidFill>
+                <a:latin typeface="Helvetica Neue"/>
+                <a:ea typeface="PingFang SC"/>
+              </a:rPr>
+              <a:t>（2026-07-05T08:18:37+00:00）</a:t>
+            </a:r>
+          </a:p>
+          <a:p>
+            <a:pPr>
               <a:lnSpc>
                 <a:spcPct val="110000"/>
               </a:lnSpc>
@@ -3608,7 +3837,28 @@
                 <a:latin typeface="Helvetica Neue"/>
                 <a:ea typeface="PingFang SC"/>
               </a:rPr>
-              <a:t>ev-s-20260705-745a-12［news］https://hn.algolia.com/api/v1/search_by_date?query=inflation&amp;tags=story&amp;hitsPerPage=30&amp;numericFilters=created_at_i%3E%3D1626480000%2Ccreated_at_i%3C%3D1640303999（2026-07-05T08:19:20+00:00）</a:t>
+              <a:t>ev-s-20260705-745a-12［news］</a:t>
+            </a:r>
+            <a:r>
+              <a:rPr sz="1050" b="0">
+                <a:solidFill>
+                  <a:srgbClr val="2A63E8"/>
+                </a:solidFill>
+                <a:latin typeface="Helvetica Neue"/>
+                <a:hlinkClick r:id="rId11"/>
+                <a:ea typeface="PingFang SC"/>
+              </a:rPr>
+              <a:t>https://hn.algolia.com/api/v1/search_by_date?query=inflation&amp;tags=story&amp;hitsPerPage=30&amp;numericFilters=created_at_i%3E%3D1626480000%2Ccreated_at_i%3C%3D1640303999</a:t>
+            </a:r>
+            <a:r>
+              <a:rPr sz="1050" b="0">
+                <a:solidFill>
+                  <a:srgbClr val="5B6B81"/>
+                </a:solidFill>
+                <a:latin typeface="Helvetica Neue"/>
+                <a:ea typeface="PingFang SC"/>
+              </a:rPr>
+              <a:t>（2026-07-05T08:19:20+00:00）</a:t>
             </a:r>
           </a:p>
         </p:txBody>
@@ -3769,7 +4019,7 @@
           </a:bodyPr>
           <a:lstStyle/>
           <a:p>
-            <a:pPr algn="l">
+            <a:pPr>
               <a:lnSpc>
                 <a:spcPct val="110000"/>
               </a:lnSpc>
@@ -3785,11 +4035,32 @@
                 <a:latin typeface="Helvetica Neue"/>
                 <a:ea typeface="PingFang SC"/>
               </a:rPr>
-              <a:t>ev-s-20260705-745a-13［news］https://hn.algolia.com/api/v1/search_by_date?query=gold&amp;tags=story&amp;hitsPerPage=30&amp;numericFilters=created_at_i%3E%3D1626480000%2Ccreated_at_i%3C%3D1640303999（2026-07-05T08:19:20+00:00）</a:t>
-            </a:r>
-          </a:p>
-          <a:p>
-            <a:pPr algn="l">
+              <a:t>ev-s-20260705-745a-13［news］</a:t>
+            </a:r>
+            <a:r>
+              <a:rPr sz="1050" b="0">
+                <a:solidFill>
+                  <a:srgbClr val="2A63E8"/>
+                </a:solidFill>
+                <a:latin typeface="Helvetica Neue"/>
+                <a:hlinkClick r:id="rId2"/>
+                <a:ea typeface="PingFang SC"/>
+              </a:rPr>
+              <a:t>https://hn.algolia.com/api/v1/search_by_date?query=gold&amp;tags=story&amp;hitsPerPage=30&amp;numericFilters=created_at_i%3E%3D1626480000%2Ccreated_at_i%3C%3D1640303999</a:t>
+            </a:r>
+            <a:r>
+              <a:rPr sz="1050" b="0">
+                <a:solidFill>
+                  <a:srgbClr val="5B6B81"/>
+                </a:solidFill>
+                <a:latin typeface="Helvetica Neue"/>
+                <a:ea typeface="PingFang SC"/>
+              </a:rPr>
+              <a:t>（2026-07-05T08:19:20+00:00）</a:t>
+            </a:r>
+          </a:p>
+          <a:p>
+            <a:pPr>
               <a:lnSpc>
                 <a:spcPct val="110000"/>
               </a:lnSpc>
@@ -3805,11 +4076,32 @@
                 <a:latin typeface="Helvetica Neue"/>
                 <a:ea typeface="PingFang SC"/>
               </a:rPr>
-              <a:t>ev-s-20260705-745a-14［news］https://hn.algolia.com/api/v1/search_by_date?query=bitcoin&amp;tags=story&amp;hitsPerPage=30&amp;numericFilters=created_at_i%3E%3D1626480000%2Ccreated_at_i%3C%3D1640303999（2026-07-05T08:19:20+00:00）</a:t>
-            </a:r>
-          </a:p>
-          <a:p>
-            <a:pPr algn="l">
+              <a:t>ev-s-20260705-745a-14［news］</a:t>
+            </a:r>
+            <a:r>
+              <a:rPr sz="1050" b="0">
+                <a:solidFill>
+                  <a:srgbClr val="2A63E8"/>
+                </a:solidFill>
+                <a:latin typeface="Helvetica Neue"/>
+                <a:hlinkClick r:id="rId3"/>
+                <a:ea typeface="PingFang SC"/>
+              </a:rPr>
+              <a:t>https://hn.algolia.com/api/v1/search_by_date?query=bitcoin&amp;tags=story&amp;hitsPerPage=30&amp;numericFilters=created_at_i%3E%3D1626480000%2Ccreated_at_i%3C%3D1640303999</a:t>
+            </a:r>
+            <a:r>
+              <a:rPr sz="1050" b="0">
+                <a:solidFill>
+                  <a:srgbClr val="5B6B81"/>
+                </a:solidFill>
+                <a:latin typeface="Helvetica Neue"/>
+                <a:ea typeface="PingFang SC"/>
+              </a:rPr>
+              <a:t>（2026-07-05T08:19:20+00:00）</a:t>
+            </a:r>
+          </a:p>
+          <a:p>
+            <a:pPr>
               <a:lnSpc>
                 <a:spcPct val="110000"/>
               </a:lnSpc>
@@ -3825,11 +4117,32 @@
                 <a:latin typeface="Helvetica Neue"/>
                 <a:ea typeface="PingFang SC"/>
               </a:rPr>
-              <a:t>ev-s-20260705-745a-15［news］https://hn.algolia.com/api/v1/search_by_date?query=russia&amp;tags=story&amp;hitsPerPage=30&amp;numericFilters=created_at_i%3E%3D1641945600%2Ccreated_at_i%3C%3D1650326399（2026-07-05T08:19:28+00:00）</a:t>
-            </a:r>
-          </a:p>
-          <a:p>
-            <a:pPr algn="l">
+              <a:t>ev-s-20260705-745a-15［news］</a:t>
+            </a:r>
+            <a:r>
+              <a:rPr sz="1050" b="0">
+                <a:solidFill>
+                  <a:srgbClr val="2A63E8"/>
+                </a:solidFill>
+                <a:latin typeface="Helvetica Neue"/>
+                <a:hlinkClick r:id="rId4"/>
+                <a:ea typeface="PingFang SC"/>
+              </a:rPr>
+              <a:t>https://hn.algolia.com/api/v1/search_by_date?query=russia&amp;tags=story&amp;hitsPerPage=30&amp;numericFilters=created_at_i%3E%3D1641945600%2Ccreated_at_i%3C%3D1650326399</a:t>
+            </a:r>
+            <a:r>
+              <a:rPr sz="1050" b="0">
+                <a:solidFill>
+                  <a:srgbClr val="5B6B81"/>
+                </a:solidFill>
+                <a:latin typeface="Helvetica Neue"/>
+                <a:ea typeface="PingFang SC"/>
+              </a:rPr>
+              <a:t>（2026-07-05T08:19:28+00:00）</a:t>
+            </a:r>
+          </a:p>
+          <a:p>
+            <a:pPr>
               <a:lnSpc>
                 <a:spcPct val="110000"/>
               </a:lnSpc>
@@ -3845,11 +4158,32 @@
                 <a:latin typeface="Helvetica Neue"/>
                 <a:ea typeface="PingFang SC"/>
               </a:rPr>
-              <a:t>ev-s-20260705-745a-16［news］https://hn.algolia.com/api/v1/search_by_date?query=bitcoin&amp;tags=story&amp;hitsPerPage=30&amp;numericFilters=created_at_i%3E%3D1641945600%2Ccreated_at_i%3C%3D1650326399（2026-07-05T08:19:28+00:00）</a:t>
-            </a:r>
-          </a:p>
-          <a:p>
-            <a:pPr algn="l">
+              <a:t>ev-s-20260705-745a-16［news］</a:t>
+            </a:r>
+            <a:r>
+              <a:rPr sz="1050" b="0">
+                <a:solidFill>
+                  <a:srgbClr val="2A63E8"/>
+                </a:solidFill>
+                <a:latin typeface="Helvetica Neue"/>
+                <a:hlinkClick r:id="rId5"/>
+                <a:ea typeface="PingFang SC"/>
+              </a:rPr>
+              <a:t>https://hn.algolia.com/api/v1/search_by_date?query=bitcoin&amp;tags=story&amp;hitsPerPage=30&amp;numericFilters=created_at_i%3E%3D1641945600%2Ccreated_at_i%3C%3D1650326399</a:t>
+            </a:r>
+            <a:r>
+              <a:rPr sz="1050" b="0">
+                <a:solidFill>
+                  <a:srgbClr val="5B6B81"/>
+                </a:solidFill>
+                <a:latin typeface="Helvetica Neue"/>
+                <a:ea typeface="PingFang SC"/>
+              </a:rPr>
+              <a:t>（2026-07-05T08:19:28+00:00）</a:t>
+            </a:r>
+          </a:p>
+          <a:p>
+            <a:pPr>
               <a:lnSpc>
                 <a:spcPct val="110000"/>
               </a:lnSpc>
@@ -3865,11 +4199,32 @@
                 <a:latin typeface="Helvetica Neue"/>
                 <a:ea typeface="PingFang SC"/>
               </a:rPr>
-              <a:t>ev-s-20260705-745a-17［news］https://hn.algolia.com/api/v1/search_by_date?query=fed&amp;tags=story&amp;hitsPerPage=30&amp;numericFilters=created_at_i%3E%3D1641945600%2Ccreated_at_i%3C%3D1650326399（2026-07-05T08:19:29+00:00）</a:t>
-            </a:r>
-          </a:p>
-          <a:p>
-            <a:pPr algn="l">
+              <a:t>ev-s-20260705-745a-17［news］</a:t>
+            </a:r>
+            <a:r>
+              <a:rPr sz="1050" b="0">
+                <a:solidFill>
+                  <a:srgbClr val="2A63E8"/>
+                </a:solidFill>
+                <a:latin typeface="Helvetica Neue"/>
+                <a:hlinkClick r:id="rId6"/>
+                <a:ea typeface="PingFang SC"/>
+              </a:rPr>
+              <a:t>https://hn.algolia.com/api/v1/search_by_date?query=fed&amp;tags=story&amp;hitsPerPage=30&amp;numericFilters=created_at_i%3E%3D1641945600%2Ccreated_at_i%3C%3D1650326399</a:t>
+            </a:r>
+            <a:r>
+              <a:rPr sz="1050" b="0">
+                <a:solidFill>
+                  <a:srgbClr val="5B6B81"/>
+                </a:solidFill>
+                <a:latin typeface="Helvetica Neue"/>
+                <a:ea typeface="PingFang SC"/>
+              </a:rPr>
+              <a:t>（2026-07-05T08:19:29+00:00）</a:t>
+            </a:r>
+          </a:p>
+          <a:p>
+            <a:pPr>
               <a:lnSpc>
                 <a:spcPct val="110000"/>
               </a:lnSpc>
@@ -3885,11 +4240,32 @@
                 <a:latin typeface="Helvetica Neue"/>
                 <a:ea typeface="PingFang SC"/>
               </a:rPr>
-              <a:t>ev-s-20260705-745a-18［news］https://hn.algolia.com/api/v1/search_by_date?query=bitcoin&amp;tags=story&amp;hitsPerPage=30&amp;numericFilters=created_at_i%3E%3D1656892800%2Ccreated_at_i%3C%3D1665014399（2026-07-05T08:19:47+00:00）</a:t>
-            </a:r>
-          </a:p>
-          <a:p>
-            <a:pPr algn="l">
+              <a:t>ev-s-20260705-745a-18［news］</a:t>
+            </a:r>
+            <a:r>
+              <a:rPr sz="1050" b="0">
+                <a:solidFill>
+                  <a:srgbClr val="2A63E8"/>
+                </a:solidFill>
+                <a:latin typeface="Helvetica Neue"/>
+                <a:hlinkClick r:id="rId7"/>
+                <a:ea typeface="PingFang SC"/>
+              </a:rPr>
+              <a:t>https://hn.algolia.com/api/v1/search_by_date?query=bitcoin&amp;tags=story&amp;hitsPerPage=30&amp;numericFilters=created_at_i%3E%3D1656892800%2Ccreated_at_i%3C%3D1665014399</a:t>
+            </a:r>
+            <a:r>
+              <a:rPr sz="1050" b="0">
+                <a:solidFill>
+                  <a:srgbClr val="5B6B81"/>
+                </a:solidFill>
+                <a:latin typeface="Helvetica Neue"/>
+                <a:ea typeface="PingFang SC"/>
+              </a:rPr>
+              <a:t>（2026-07-05T08:19:47+00:00）</a:t>
+            </a:r>
+          </a:p>
+          <a:p>
+            <a:pPr>
               <a:lnSpc>
                 <a:spcPct val="110000"/>
               </a:lnSpc>
@@ -3905,11 +4281,32 @@
                 <a:latin typeface="Helvetica Neue"/>
                 <a:ea typeface="PingFang SC"/>
               </a:rPr>
-              <a:t>ev-s-20260705-745a-19［news］https://hn.algolia.com/api/v1/search_by_date?query=rate+hike&amp;tags=story&amp;hitsPerPage=30&amp;numericFilters=created_at_i%3E%3D1656892800%2Ccreated_at_i%3C%3D1665014399（2026-07-05T08:19:47+00:00）</a:t>
-            </a:r>
-          </a:p>
-          <a:p>
-            <a:pPr algn="l">
+              <a:t>ev-s-20260705-745a-19［news］</a:t>
+            </a:r>
+            <a:r>
+              <a:rPr sz="1050" b="0">
+                <a:solidFill>
+                  <a:srgbClr val="2A63E8"/>
+                </a:solidFill>
+                <a:latin typeface="Helvetica Neue"/>
+                <a:hlinkClick r:id="rId8"/>
+                <a:ea typeface="PingFang SC"/>
+              </a:rPr>
+              <a:t>https://hn.algolia.com/api/v1/search_by_date?query=rate+hike&amp;tags=story&amp;hitsPerPage=30&amp;numericFilters=created_at_i%3E%3D1656892800%2Ccreated_at_i%3C%3D1665014399</a:t>
+            </a:r>
+            <a:r>
+              <a:rPr sz="1050" b="0">
+                <a:solidFill>
+                  <a:srgbClr val="5B6B81"/>
+                </a:solidFill>
+                <a:latin typeface="Helvetica Neue"/>
+                <a:ea typeface="PingFang SC"/>
+              </a:rPr>
+              <a:t>（2026-07-05T08:19:47+00:00）</a:t>
+            </a:r>
+          </a:p>
+          <a:p>
+            <a:pPr>
               <a:lnSpc>
                 <a:spcPct val="110000"/>
               </a:lnSpc>
@@ -3925,11 +4322,32 @@
                 <a:latin typeface="Helvetica Neue"/>
                 <a:ea typeface="PingFang SC"/>
               </a:rPr>
-              <a:t>ev-s-20260705-745a-20［news］https://hn.algolia.com/api/v1/search_by_date?query=cpi&amp;tags=story&amp;hitsPerPage=30&amp;numericFilters=created_at_i%3E%3D1656892800%2Ccreated_at_i%3C%3D1665014399（2026-07-05T08:19:47+00:00）</a:t>
-            </a:r>
-          </a:p>
-          <a:p>
-            <a:pPr algn="l">
+              <a:t>ev-s-20260705-745a-20［news］</a:t>
+            </a:r>
+            <a:r>
+              <a:rPr sz="1050" b="0">
+                <a:solidFill>
+                  <a:srgbClr val="2A63E8"/>
+                </a:solidFill>
+                <a:latin typeface="Helvetica Neue"/>
+                <a:hlinkClick r:id="rId9"/>
+                <a:ea typeface="PingFang SC"/>
+              </a:rPr>
+              <a:t>https://hn.algolia.com/api/v1/search_by_date?query=cpi&amp;tags=story&amp;hitsPerPage=30&amp;numericFilters=created_at_i%3E%3D1656892800%2Ccreated_at_i%3C%3D1665014399</a:t>
+            </a:r>
+            <a:r>
+              <a:rPr sz="1050" b="0">
+                <a:solidFill>
+                  <a:srgbClr val="5B6B81"/>
+                </a:solidFill>
+                <a:latin typeface="Helvetica Neue"/>
+                <a:ea typeface="PingFang SC"/>
+              </a:rPr>
+              <a:t>（2026-07-05T08:19:47+00:00）</a:t>
+            </a:r>
+          </a:p>
+          <a:p>
+            <a:pPr>
               <a:lnSpc>
                 <a:spcPct val="110000"/>
               </a:lnSpc>
@@ -3945,11 +4363,32 @@
                 <a:latin typeface="Helvetica Neue"/>
                 <a:ea typeface="PingFang SC"/>
               </a:rPr>
-              <a:t>ev-s-20260705-745a-21［news］https://hn.algolia.com/api/v1/search_by_date?query=credit+suisse&amp;tags=story&amp;hitsPerPage=30&amp;numericFilters=created_at_i%3E%3D1672617600%2Ccreated_at_i%3C%3D1680047999（2026-07-05T08:20:07+00:00）</a:t>
-            </a:r>
-          </a:p>
-          <a:p>
-            <a:pPr algn="l">
+              <a:t>ev-s-20260705-745a-21［news］</a:t>
+            </a:r>
+            <a:r>
+              <a:rPr sz="1050" b="0">
+                <a:solidFill>
+                  <a:srgbClr val="2A63E8"/>
+                </a:solidFill>
+                <a:latin typeface="Helvetica Neue"/>
+                <a:hlinkClick r:id="rId10"/>
+                <a:ea typeface="PingFang SC"/>
+              </a:rPr>
+              <a:t>https://hn.algolia.com/api/v1/search_by_date?query=credit+suisse&amp;tags=story&amp;hitsPerPage=30&amp;numericFilters=created_at_i%3E%3D1672617600%2Ccreated_at_i%3C%3D1680047999</a:t>
+            </a:r>
+            <a:r>
+              <a:rPr sz="1050" b="0">
+                <a:solidFill>
+                  <a:srgbClr val="5B6B81"/>
+                </a:solidFill>
+                <a:latin typeface="Helvetica Neue"/>
+                <a:ea typeface="PingFang SC"/>
+              </a:rPr>
+              <a:t>（2026-07-05T08:20:07+00:00）</a:t>
+            </a:r>
+          </a:p>
+          <a:p>
+            <a:pPr>
               <a:lnSpc>
                 <a:spcPct val="110000"/>
               </a:lnSpc>
@@ -3965,11 +4404,32 @@
                 <a:latin typeface="Helvetica Neue"/>
                 <a:ea typeface="PingFang SC"/>
               </a:rPr>
-              <a:t>ev-s-20260705-745a-22［news］https://hn.algolia.com/api/v1/search_by_date?query=SVB&amp;tags=story&amp;hitsPerPage=30&amp;numericFilters=created_at_i%3E%3D1672617600%2Ccreated_at_i%3C%3D1680047999（2026-07-05T08:20:07+00:00）</a:t>
-            </a:r>
-          </a:p>
-          <a:p>
-            <a:pPr algn="l">
+              <a:t>ev-s-20260705-745a-22［news］</a:t>
+            </a:r>
+            <a:r>
+              <a:rPr sz="1050" b="0">
+                <a:solidFill>
+                  <a:srgbClr val="2A63E8"/>
+                </a:solidFill>
+                <a:latin typeface="Helvetica Neue"/>
+                <a:hlinkClick r:id="rId11"/>
+                <a:ea typeface="PingFang SC"/>
+              </a:rPr>
+              <a:t>https://hn.algolia.com/api/v1/search_by_date?query=SVB&amp;tags=story&amp;hitsPerPage=30&amp;numericFilters=created_at_i%3E%3D1672617600%2Ccreated_at_i%3C%3D1680047999</a:t>
+            </a:r>
+            <a:r>
+              <a:rPr sz="1050" b="0">
+                <a:solidFill>
+                  <a:srgbClr val="5B6B81"/>
+                </a:solidFill>
+                <a:latin typeface="Helvetica Neue"/>
+                <a:ea typeface="PingFang SC"/>
+              </a:rPr>
+              <a:t>（2026-07-05T08:20:07+00:00）</a:t>
+            </a:r>
+          </a:p>
+          <a:p>
+            <a:pPr>
               <a:lnSpc>
                 <a:spcPct val="110000"/>
               </a:lnSpc>
@@ -3985,11 +4445,32 @@
                 <a:latin typeface="Helvetica Neue"/>
                 <a:ea typeface="PingFang SC"/>
               </a:rPr>
-              <a:t>ev-s-20260705-745a-23［news］https://hn.algolia.com/api/v1/search_by_date?query=FTX&amp;tags=story&amp;hitsPerPage=30&amp;numericFilters=created_at_i%3E%3D1666915200%2Ccreated_at_i%3C%3D1670543999（2026-07-05T08:20:07+00:00）</a:t>
-            </a:r>
-          </a:p>
-          <a:p>
-            <a:pPr algn="l">
+              <a:t>ev-s-20260705-745a-23［news］</a:t>
+            </a:r>
+            <a:r>
+              <a:rPr sz="1050" b="0">
+                <a:solidFill>
+                  <a:srgbClr val="2A63E8"/>
+                </a:solidFill>
+                <a:latin typeface="Helvetica Neue"/>
+                <a:hlinkClick r:id="rId12"/>
+                <a:ea typeface="PingFang SC"/>
+              </a:rPr>
+              <a:t>https://hn.algolia.com/api/v1/search_by_date?query=FTX&amp;tags=story&amp;hitsPerPage=30&amp;numericFilters=created_at_i%3E%3D1666915200%2Ccreated_at_i%3C%3D1670543999</a:t>
+            </a:r>
+            <a:r>
+              <a:rPr sz="1050" b="0">
+                <a:solidFill>
+                  <a:srgbClr val="5B6B81"/>
+                </a:solidFill>
+                <a:latin typeface="Helvetica Neue"/>
+                <a:ea typeface="PingFang SC"/>
+              </a:rPr>
+              <a:t>（2026-07-05T08:20:07+00:00）</a:t>
+            </a:r>
+          </a:p>
+          <a:p>
+            <a:pPr>
               <a:lnSpc>
                 <a:spcPct val="110000"/>
               </a:lnSpc>
@@ -4005,7 +4486,28 @@
                 <a:latin typeface="Helvetica Neue"/>
                 <a:ea typeface="PingFang SC"/>
               </a:rPr>
-              <a:t>ev-s-20260705-745a-24［news］https://hn.algolia.com/api/v1/search_by_date?query=blackrock&amp;tags=story&amp;hitsPerPage=30&amp;numericFilters=created_at_i%3E%3D1683590400%2Ccreated_at_i%3C%3D1702339199（2026-07-05T08:20:27+00:00）</a:t>
+              <a:t>ev-s-20260705-745a-24［news］</a:t>
+            </a:r>
+            <a:r>
+              <a:rPr sz="1050" b="0">
+                <a:solidFill>
+                  <a:srgbClr val="2A63E8"/>
+                </a:solidFill>
+                <a:latin typeface="Helvetica Neue"/>
+                <a:hlinkClick r:id="rId13"/>
+                <a:ea typeface="PingFang SC"/>
+              </a:rPr>
+              <a:t>https://hn.algolia.com/api/v1/search_by_date?query=blackrock&amp;tags=story&amp;hitsPerPage=30&amp;numericFilters=created_at_i%3E%3D1683590400%2Ccreated_at_i%3C%3D1702339199</a:t>
+            </a:r>
+            <a:r>
+              <a:rPr sz="1050" b="0">
+                <a:solidFill>
+                  <a:srgbClr val="5B6B81"/>
+                </a:solidFill>
+                <a:latin typeface="Helvetica Neue"/>
+                <a:ea typeface="PingFang SC"/>
+              </a:rPr>
+              <a:t>（2026-07-05T08:20:27+00:00）</a:t>
             </a:r>
           </a:p>
         </p:txBody>
@@ -4166,7 +4668,7 @@
           </a:bodyPr>
           <a:lstStyle/>
           <a:p>
-            <a:pPr algn="l">
+            <a:pPr>
               <a:lnSpc>
                 <a:spcPct val="110000"/>
               </a:lnSpc>
@@ -4182,11 +4684,32 @@
                 <a:latin typeface="Helvetica Neue"/>
                 <a:ea typeface="PingFang SC"/>
               </a:rPr>
-              <a:t>ev-s-20260705-745a-25［news］https://hn.algolia.com/api/v1/search_by_date?query=debt+ceiling&amp;tags=story&amp;hitsPerPage=30&amp;numericFilters=created_at_i%3E%3D1683590400%2Ccreated_at_i%3C%3D1702339199（2026-07-05T08:20:27+00:00）</a:t>
-            </a:r>
-          </a:p>
-          <a:p>
-            <a:pPr algn="l">
+              <a:t>ev-s-20260705-745a-25［news］</a:t>
+            </a:r>
+            <a:r>
+              <a:rPr sz="1050" b="0">
+                <a:solidFill>
+                  <a:srgbClr val="2A63E8"/>
+                </a:solidFill>
+                <a:latin typeface="Helvetica Neue"/>
+                <a:hlinkClick r:id="rId2"/>
+                <a:ea typeface="PingFang SC"/>
+              </a:rPr>
+              <a:t>https://hn.algolia.com/api/v1/search_by_date?query=debt+ceiling&amp;tags=story&amp;hitsPerPage=30&amp;numericFilters=created_at_i%3E%3D1683590400%2Ccreated_at_i%3C%3D1702339199</a:t>
+            </a:r>
+            <a:r>
+              <a:rPr sz="1050" b="0">
+                <a:solidFill>
+                  <a:srgbClr val="5B6B81"/>
+                </a:solidFill>
+                <a:latin typeface="Helvetica Neue"/>
+                <a:ea typeface="PingFang SC"/>
+              </a:rPr>
+              <a:t>（2026-07-05T08:20:27+00:00）</a:t>
+            </a:r>
+          </a:p>
+          <a:p>
+            <a:pPr>
               <a:lnSpc>
                 <a:spcPct val="110000"/>
               </a:lnSpc>
@@ -4202,11 +4725,32 @@
                 <a:latin typeface="Helvetica Neue"/>
                 <a:ea typeface="PingFang SC"/>
               </a:rPr>
-              <a:t>ev-s-20260705-745a-26［news］https://hn.algolia.com/api/v1/search_by_date?query=gold&amp;tags=story&amp;hitsPerPage=30&amp;numericFilters=created_at_i%3E%3D1683590400%2Ccreated_at_i%3C%3D1702339199（2026-07-05T08:20:27+00:00）</a:t>
-            </a:r>
-          </a:p>
-          <a:p>
-            <a:pPr algn="l">
+              <a:t>ev-s-20260705-745a-26［news］</a:t>
+            </a:r>
+            <a:r>
+              <a:rPr sz="1050" b="0">
+                <a:solidFill>
+                  <a:srgbClr val="2A63E8"/>
+                </a:solidFill>
+                <a:latin typeface="Helvetica Neue"/>
+                <a:hlinkClick r:id="rId3"/>
+                <a:ea typeface="PingFang SC"/>
+              </a:rPr>
+              <a:t>https://hn.algolia.com/api/v1/search_by_date?query=gold&amp;tags=story&amp;hitsPerPage=30&amp;numericFilters=created_at_i%3E%3D1683590400%2Ccreated_at_i%3C%3D1702339199</a:t>
+            </a:r>
+            <a:r>
+              <a:rPr sz="1050" b="0">
+                <a:solidFill>
+                  <a:srgbClr val="5B6B81"/>
+                </a:solidFill>
+                <a:latin typeface="Helvetica Neue"/>
+                <a:ea typeface="PingFang SC"/>
+              </a:rPr>
+              <a:t>（2026-07-05T08:20:27+00:00）</a:t>
+            </a:r>
+          </a:p>
+          <a:p>
+            <a:pPr>
               <a:lnSpc>
                 <a:spcPct val="110000"/>
               </a:lnSpc>
@@ -4222,11 +4766,32 @@
                 <a:latin typeface="Helvetica Neue"/>
                 <a:ea typeface="PingFang SC"/>
               </a:rPr>
-              <a:t>ev-s-20260705-745a-27［news］https://hn.algolia.com/api/v1/search_by_date?query=rate+cut&amp;tags=story&amp;hitsPerPage=30&amp;numericFilters=created_at_i%3E%3D1717113600%2Ccreated_at_i%3C%3D1727395199（2026-07-05T08:20:49+00:00）</a:t>
-            </a:r>
-          </a:p>
-          <a:p>
-            <a:pPr algn="l">
+              <a:t>ev-s-20260705-745a-27［news］</a:t>
+            </a:r>
+            <a:r>
+              <a:rPr sz="1050" b="0">
+                <a:solidFill>
+                  <a:srgbClr val="2A63E8"/>
+                </a:solidFill>
+                <a:latin typeface="Helvetica Neue"/>
+                <a:hlinkClick r:id="rId4"/>
+                <a:ea typeface="PingFang SC"/>
+              </a:rPr>
+              <a:t>https://hn.algolia.com/api/v1/search_by_date?query=rate+cut&amp;tags=story&amp;hitsPerPage=30&amp;numericFilters=created_at_i%3E%3D1717113600%2Ccreated_at_i%3C%3D1727395199</a:t>
+            </a:r>
+            <a:r>
+              <a:rPr sz="1050" b="0">
+                <a:solidFill>
+                  <a:srgbClr val="5B6B81"/>
+                </a:solidFill>
+                <a:latin typeface="Helvetica Neue"/>
+                <a:ea typeface="PingFang SC"/>
+              </a:rPr>
+              <a:t>（2026-07-05T08:20:49+00:00）</a:t>
+            </a:r>
+          </a:p>
+          <a:p>
+            <a:pPr>
               <a:lnSpc>
                 <a:spcPct val="110000"/>
               </a:lnSpc>
@@ -4242,11 +4807,32 @@
                 <a:latin typeface="Helvetica Neue"/>
                 <a:ea typeface="PingFang SC"/>
               </a:rPr>
-              <a:t>ev-s-20260705-745a-28［news］https://hn.algolia.com/api/v1/search_by_date?query=gold&amp;tags=story&amp;hitsPerPage=30&amp;numericFilters=created_at_i%3E%3D1717113600%2Ccreated_at_i%3C%3D1727395199（2026-07-05T08:20:49+00:00）</a:t>
-            </a:r>
-          </a:p>
-          <a:p>
-            <a:pPr algn="l">
+              <a:t>ev-s-20260705-745a-28［news］</a:t>
+            </a:r>
+            <a:r>
+              <a:rPr sz="1050" b="0">
+                <a:solidFill>
+                  <a:srgbClr val="2A63E8"/>
+                </a:solidFill>
+                <a:latin typeface="Helvetica Neue"/>
+                <a:hlinkClick r:id="rId5"/>
+                <a:ea typeface="PingFang SC"/>
+              </a:rPr>
+              <a:t>https://hn.algolia.com/api/v1/search_by_date?query=gold&amp;tags=story&amp;hitsPerPage=30&amp;numericFilters=created_at_i%3E%3D1717113600%2Ccreated_at_i%3C%3D1727395199</a:t>
+            </a:r>
+            <a:r>
+              <a:rPr sz="1050" b="0">
+                <a:solidFill>
+                  <a:srgbClr val="5B6B81"/>
+                </a:solidFill>
+                <a:latin typeface="Helvetica Neue"/>
+                <a:ea typeface="PingFang SC"/>
+              </a:rPr>
+              <a:t>（2026-07-05T08:20:49+00:00）</a:t>
+            </a:r>
+          </a:p>
+          <a:p>
+            <a:pPr>
               <a:lnSpc>
                 <a:spcPct val="110000"/>
               </a:lnSpc>
@@ -4262,11 +4848,32 @@
                 <a:latin typeface="Helvetica Neue"/>
                 <a:ea typeface="PingFang SC"/>
               </a:rPr>
-              <a:t>ev-s-20260705-745a-29［news］https://hn.algolia.com/api/v1/search_by_date?query=ETF&amp;tags=story&amp;hitsPerPage=30&amp;numericFilters=created_at_i%3E%3D1705276800%2Ccreated_at_i%3C%3D1717113599（2026-07-05T08:20:49+00:00）</a:t>
-            </a:r>
-          </a:p>
-          <a:p>
-            <a:pPr algn="l">
+              <a:t>ev-s-20260705-745a-29［news］</a:t>
+            </a:r>
+            <a:r>
+              <a:rPr sz="1050" b="0">
+                <a:solidFill>
+                  <a:srgbClr val="2A63E8"/>
+                </a:solidFill>
+                <a:latin typeface="Helvetica Neue"/>
+                <a:hlinkClick r:id="rId6"/>
+                <a:ea typeface="PingFang SC"/>
+              </a:rPr>
+              <a:t>https://hn.algolia.com/api/v1/search_by_date?query=ETF&amp;tags=story&amp;hitsPerPage=30&amp;numericFilters=created_at_i%3E%3D1705276800%2Ccreated_at_i%3C%3D1717113599</a:t>
+            </a:r>
+            <a:r>
+              <a:rPr sz="1050" b="0">
+                <a:solidFill>
+                  <a:srgbClr val="5B6B81"/>
+                </a:solidFill>
+                <a:latin typeface="Helvetica Neue"/>
+                <a:ea typeface="PingFang SC"/>
+              </a:rPr>
+              <a:t>（2026-07-05T08:20:49+00:00）</a:t>
+            </a:r>
+          </a:p>
+          <a:p>
+            <a:pPr>
               <a:lnSpc>
                 <a:spcPct val="110000"/>
               </a:lnSpc>
@@ -4282,11 +4889,32 @@
                 <a:latin typeface="Helvetica Neue"/>
                 <a:ea typeface="PingFang SC"/>
               </a:rPr>
-              <a:t>ev-s-20260705-745a-30［news］https://hn.algolia.com/api/v1/search_by_date?query=tariff&amp;tags=story&amp;hitsPerPage=30&amp;numericFilters=created_at_i%3E%3D1730246400%2Ccreated_at_i%3C%3D1744329599（2026-07-05T08:21:08+00:00）</a:t>
-            </a:r>
-          </a:p>
-          <a:p>
-            <a:pPr algn="l">
+              <a:t>ev-s-20260705-745a-30［news］</a:t>
+            </a:r>
+            <a:r>
+              <a:rPr sz="1050" b="0">
+                <a:solidFill>
+                  <a:srgbClr val="2A63E8"/>
+                </a:solidFill>
+                <a:latin typeface="Helvetica Neue"/>
+                <a:hlinkClick r:id="rId7"/>
+                <a:ea typeface="PingFang SC"/>
+              </a:rPr>
+              <a:t>https://hn.algolia.com/api/v1/search_by_date?query=tariff&amp;tags=story&amp;hitsPerPage=30&amp;numericFilters=created_at_i%3E%3D1730246400%2Ccreated_at_i%3C%3D1744329599</a:t>
+            </a:r>
+            <a:r>
+              <a:rPr sz="1050" b="0">
+                <a:solidFill>
+                  <a:srgbClr val="5B6B81"/>
+                </a:solidFill>
+                <a:latin typeface="Helvetica Neue"/>
+                <a:ea typeface="PingFang SC"/>
+              </a:rPr>
+              <a:t>（2026-07-05T08:21:08+00:00）</a:t>
+            </a:r>
+          </a:p>
+          <a:p>
+            <a:pPr>
               <a:lnSpc>
                 <a:spcPct val="110000"/>
               </a:lnSpc>
@@ -4302,11 +4930,32 @@
                 <a:latin typeface="Helvetica Neue"/>
                 <a:ea typeface="PingFang SC"/>
               </a:rPr>
-              <a:t>ev-s-20260705-745a-31［news］https://hn.algolia.com/api/v1/search_by_date?query=trump&amp;tags=story&amp;hitsPerPage=30&amp;numericFilters=created_at_i%3E%3D1730246400%2Ccreated_at_i%3C%3D1744329599（2026-07-05T08:21:08+00:00）</a:t>
-            </a:r>
-          </a:p>
-          <a:p>
-            <a:pPr algn="l">
+              <a:t>ev-s-20260705-745a-31［news］</a:t>
+            </a:r>
+            <a:r>
+              <a:rPr sz="1050" b="0">
+                <a:solidFill>
+                  <a:srgbClr val="2A63E8"/>
+                </a:solidFill>
+                <a:latin typeface="Helvetica Neue"/>
+                <a:hlinkClick r:id="rId8"/>
+                <a:ea typeface="PingFang SC"/>
+              </a:rPr>
+              <a:t>https://hn.algolia.com/api/v1/search_by_date?query=trump&amp;tags=story&amp;hitsPerPage=30&amp;numericFilters=created_at_i%3E%3D1730246400%2Ccreated_at_i%3C%3D1744329599</a:t>
+            </a:r>
+            <a:r>
+              <a:rPr sz="1050" b="0">
+                <a:solidFill>
+                  <a:srgbClr val="5B6B81"/>
+                </a:solidFill>
+                <a:latin typeface="Helvetica Neue"/>
+                <a:ea typeface="PingFang SC"/>
+              </a:rPr>
+              <a:t>（2026-07-05T08:21:08+00:00）</a:t>
+            </a:r>
+          </a:p>
+          <a:p>
+            <a:pPr>
               <a:lnSpc>
                 <a:spcPct val="110000"/>
               </a:lnSpc>
@@ -4322,11 +4971,32 @@
                 <a:latin typeface="Helvetica Neue"/>
                 <a:ea typeface="PingFang SC"/>
               </a:rPr>
-              <a:t>ev-s-20260705-745a-32［news］https://hn.algolia.com/api/v1/search_by_date?query=deepseek&amp;tags=story&amp;hitsPerPage=30&amp;numericFilters=created_at_i%3E%3D1730246400%2Ccreated_at_i%3C%3D1744329599（2026-07-05T08:21:08+00:00）</a:t>
-            </a:r>
-          </a:p>
-          <a:p>
-            <a:pPr algn="l">
+              <a:t>ev-s-20260705-745a-32［news］</a:t>
+            </a:r>
+            <a:r>
+              <a:rPr sz="1050" b="0">
+                <a:solidFill>
+                  <a:srgbClr val="2A63E8"/>
+                </a:solidFill>
+                <a:latin typeface="Helvetica Neue"/>
+                <a:hlinkClick r:id="rId9"/>
+                <a:ea typeface="PingFang SC"/>
+              </a:rPr>
+              <a:t>https://hn.algolia.com/api/v1/search_by_date?query=deepseek&amp;tags=story&amp;hitsPerPage=30&amp;numericFilters=created_at_i%3E%3D1730246400%2Ccreated_at_i%3C%3D1744329599</a:t>
+            </a:r>
+            <a:r>
+              <a:rPr sz="1050" b="0">
+                <a:solidFill>
+                  <a:srgbClr val="5B6B81"/>
+                </a:solidFill>
+                <a:latin typeface="Helvetica Neue"/>
+                <a:ea typeface="PingFang SC"/>
+              </a:rPr>
+              <a:t>（2026-07-05T08:21:08+00:00）</a:t>
+            </a:r>
+          </a:p>
+          <a:p>
+            <a:pPr>
               <a:lnSpc>
                 <a:spcPct val="110000"/>
               </a:lnSpc>
@@ -4342,11 +5012,32 @@
                 <a:latin typeface="Helvetica Neue"/>
                 <a:ea typeface="PingFang SC"/>
               </a:rPr>
-              <a:t>ev-s-20260705-745a-33［news］https://hn.algolia.com/api/v1/search_by_date?query=bitcoin&amp;tags=story&amp;hitsPerPage=30&amp;numericFilters=created_at_i%3E%3D1753401600%2Ccreated_at_i%3C%3D1781308799（2026-07-05T08:21:40+00:00）</a:t>
-            </a:r>
-          </a:p>
-          <a:p>
-            <a:pPr algn="l">
+              <a:t>ev-s-20260705-745a-33［news］</a:t>
+            </a:r>
+            <a:r>
+              <a:rPr sz="1050" b="0">
+                <a:solidFill>
+                  <a:srgbClr val="2A63E8"/>
+                </a:solidFill>
+                <a:latin typeface="Helvetica Neue"/>
+                <a:hlinkClick r:id="rId10"/>
+                <a:ea typeface="PingFang SC"/>
+              </a:rPr>
+              <a:t>https://hn.algolia.com/api/v1/search_by_date?query=bitcoin&amp;tags=story&amp;hitsPerPage=30&amp;numericFilters=created_at_i%3E%3D1753401600%2Ccreated_at_i%3C%3D1781308799</a:t>
+            </a:r>
+            <a:r>
+              <a:rPr sz="1050" b="0">
+                <a:solidFill>
+                  <a:srgbClr val="5B6B81"/>
+                </a:solidFill>
+                <a:latin typeface="Helvetica Neue"/>
+                <a:ea typeface="PingFang SC"/>
+              </a:rPr>
+              <a:t>（2026-07-05T08:21:40+00:00）</a:t>
+            </a:r>
+          </a:p>
+          <a:p>
+            <a:pPr>
               <a:lnSpc>
                 <a:spcPct val="110000"/>
               </a:lnSpc>
@@ -4362,11 +5053,32 @@
                 <a:latin typeface="Helvetica Neue"/>
                 <a:ea typeface="PingFang SC"/>
               </a:rPr>
-              <a:t>ev-s-20260705-745a-34［news］https://hn.algolia.com/api/v1/search_by_date?query=gold&amp;tags=story&amp;hitsPerPage=30&amp;numericFilters=created_at_i%3E%3D1753401600%2Ccreated_at_i%3C%3D1781308799（2026-07-05T08:21:40+00:00）</a:t>
-            </a:r>
-          </a:p>
-          <a:p>
-            <a:pPr algn="l">
+              <a:t>ev-s-20260705-745a-34［news］</a:t>
+            </a:r>
+            <a:r>
+              <a:rPr sz="1050" b="0">
+                <a:solidFill>
+                  <a:srgbClr val="2A63E8"/>
+                </a:solidFill>
+                <a:latin typeface="Helvetica Neue"/>
+                <a:hlinkClick r:id="rId11"/>
+                <a:ea typeface="PingFang SC"/>
+              </a:rPr>
+              <a:t>https://hn.algolia.com/api/v1/search_by_date?query=gold&amp;tags=story&amp;hitsPerPage=30&amp;numericFilters=created_at_i%3E%3D1753401600%2Ccreated_at_i%3C%3D1781308799</a:t>
+            </a:r>
+            <a:r>
+              <a:rPr sz="1050" b="0">
+                <a:solidFill>
+                  <a:srgbClr val="5B6B81"/>
+                </a:solidFill>
+                <a:latin typeface="Helvetica Neue"/>
+                <a:ea typeface="PingFang SC"/>
+              </a:rPr>
+              <a:t>（2026-07-05T08:21:40+00:00）</a:t>
+            </a:r>
+          </a:p>
+          <a:p>
+            <a:pPr>
               <a:lnSpc>
                 <a:spcPct val="110000"/>
               </a:lnSpc>
@@ -4382,11 +5094,32 @@
                 <a:latin typeface="Helvetica Neue"/>
                 <a:ea typeface="PingFang SC"/>
               </a:rPr>
-              <a:t>ev-s-20260705-745a-35［news］https://hn.algolia.com/api/v1/search_by_date?query=fed&amp;tags=story&amp;hitsPerPage=30&amp;numericFilters=created_at_i%3E%3D1753401600%2Ccreated_at_i%3C%3D1781308799（2026-07-05T08:21:40+00:00）</a:t>
-            </a:r>
-          </a:p>
-          <a:p>
-            <a:pPr algn="l">
+              <a:t>ev-s-20260705-745a-35［news］</a:t>
+            </a:r>
+            <a:r>
+              <a:rPr sz="1050" b="0">
+                <a:solidFill>
+                  <a:srgbClr val="2A63E8"/>
+                </a:solidFill>
+                <a:latin typeface="Helvetica Neue"/>
+                <a:hlinkClick r:id="rId12"/>
+                <a:ea typeface="PingFang SC"/>
+              </a:rPr>
+              <a:t>https://hn.algolia.com/api/v1/search_by_date?query=fed&amp;tags=story&amp;hitsPerPage=30&amp;numericFilters=created_at_i%3E%3D1753401600%2Ccreated_at_i%3C%3D1781308799</a:t>
+            </a:r>
+            <a:r>
+              <a:rPr sz="1050" b="0">
+                <a:solidFill>
+                  <a:srgbClr val="5B6B81"/>
+                </a:solidFill>
+                <a:latin typeface="Helvetica Neue"/>
+                <a:ea typeface="PingFang SC"/>
+              </a:rPr>
+              <a:t>（2026-07-05T08:21:40+00:00）</a:t>
+            </a:r>
+          </a:p>
+          <a:p>
+            <a:pPr>
               <a:lnSpc>
                 <a:spcPct val="110000"/>
               </a:lnSpc>
@@ -4402,7 +5135,28 @@
                 <a:latin typeface="Helvetica Neue"/>
                 <a:ea typeface="PingFang SC"/>
               </a:rPr>
-              <a:t>ev-s-20260705-745a-36［search］https://www.chards.co.uk/guides/brics-summit-2023-is-the-gold-backed-digital-currency-coming/1198（2026-07-05T08:22:01+00:00）</a:t>
+              <a:t>ev-s-20260705-745a-36［search］</a:t>
+            </a:r>
+            <a:r>
+              <a:rPr sz="1050" b="0">
+                <a:solidFill>
+                  <a:srgbClr val="2A63E8"/>
+                </a:solidFill>
+                <a:latin typeface="Helvetica Neue"/>
+                <a:hlinkClick r:id="rId13"/>
+                <a:ea typeface="PingFang SC"/>
+              </a:rPr>
+              <a:t>https://www.chards.co.uk/guides/brics-summit-2023-is-the-gold-backed-digital-currency-coming/1198</a:t>
+            </a:r>
+            <a:r>
+              <a:rPr sz="1050" b="0">
+                <a:solidFill>
+                  <a:srgbClr val="5B6B81"/>
+                </a:solidFill>
+                <a:latin typeface="Helvetica Neue"/>
+                <a:ea typeface="PingFang SC"/>
+              </a:rPr>
+              <a:t>（2026-07-05T08:22:01+00:00）</a:t>
             </a:r>
           </a:p>
         </p:txBody>
@@ -4563,7 +5317,7 @@
           </a:bodyPr>
           <a:lstStyle/>
           <a:p>
-            <a:pPr algn="l">
+            <a:pPr>
               <a:lnSpc>
                 <a:spcPct val="110000"/>
               </a:lnSpc>
@@ -4579,11 +5333,32 @@
                 <a:latin typeface="Helvetica Neue"/>
                 <a:ea typeface="PingFang SC"/>
               </a:rPr>
-              <a:t>ev-s-20260705-745a-37［search］https://www.forbes.com/sites/garthfriesen/2025/03/15/gold-price-hits-record-3000-whats-driving-the-rally（2026-07-05T08:22:01+00:00）</a:t>
-            </a:r>
-          </a:p>
-          <a:p>
-            <a:pPr algn="l">
+              <a:t>ev-s-20260705-745a-37［search］</a:t>
+            </a:r>
+            <a:r>
+              <a:rPr sz="1050" b="0">
+                <a:solidFill>
+                  <a:srgbClr val="2A63E8"/>
+                </a:solidFill>
+                <a:latin typeface="Helvetica Neue"/>
+                <a:hlinkClick r:id="rId2"/>
+                <a:ea typeface="PingFang SC"/>
+              </a:rPr>
+              <a:t>https://www.forbes.com/sites/garthfriesen/2025/03/15/gold-price-hits-record-3000-whats-driving-the-rally</a:t>
+            </a:r>
+            <a:r>
+              <a:rPr sz="1050" b="0">
+                <a:solidFill>
+                  <a:srgbClr val="5B6B81"/>
+                </a:solidFill>
+                <a:latin typeface="Helvetica Neue"/>
+                <a:ea typeface="PingFang SC"/>
+              </a:rPr>
+              <a:t>（2026-07-05T08:22:01+00:00）</a:t>
+            </a:r>
+          </a:p>
+          <a:p>
+            <a:pPr>
               <a:lnSpc>
                 <a:spcPct val="110000"/>
               </a:lnSpc>
@@ -4599,11 +5374,32 @@
                 <a:latin typeface="Helvetica Neue"/>
                 <a:ea typeface="PingFang SC"/>
               </a:rPr>
-              <a:t>ev-s-20260705-745a-38［search］https://www.nytimes.com/2021/09/24/business/china-cryptocurrency-bitcoin.html（2026-07-05T08:22:01+00:00）</a:t>
-            </a:r>
-          </a:p>
-          <a:p>
-            <a:pPr algn="l">
+              <a:t>ev-s-20260705-745a-38［search］</a:t>
+            </a:r>
+            <a:r>
+              <a:rPr sz="1050" b="0">
+                <a:solidFill>
+                  <a:srgbClr val="2A63E8"/>
+                </a:solidFill>
+                <a:latin typeface="Helvetica Neue"/>
+                <a:hlinkClick r:id="rId3"/>
+                <a:ea typeface="PingFang SC"/>
+              </a:rPr>
+              <a:t>https://www.nytimes.com/2021/09/24/business/china-cryptocurrency-bitcoin.html</a:t>
+            </a:r>
+            <a:r>
+              <a:rPr sz="1050" b="0">
+                <a:solidFill>
+                  <a:srgbClr val="5B6B81"/>
+                </a:solidFill>
+                <a:latin typeface="Helvetica Neue"/>
+                <a:ea typeface="PingFang SC"/>
+              </a:rPr>
+              <a:t>（2026-07-05T08:22:01+00:00）</a:t>
+            </a:r>
+          </a:p>
+          <a:p>
+            <a:pPr>
               <a:lnSpc>
                 <a:spcPct val="110000"/>
               </a:lnSpc>
@@ -4619,7 +5415,28 @@
                 <a:latin typeface="Helvetica Neue"/>
                 <a:ea typeface="PingFang SC"/>
               </a:rPr>
-              <a:t>ev-s-20260705-745a-39［market_data］https://query2.finance.yahoo.com/v8/finance/chart/BTC-USD?period1=1625443200&amp;period2=1783296000&amp;interval=1d&amp;events=history（2026-07-05T08:16:06+00:00）</a:t>
+              <a:t>ev-s-20260705-745a-39［market_data］</a:t>
+            </a:r>
+            <a:r>
+              <a:rPr sz="1050" b="0">
+                <a:solidFill>
+                  <a:srgbClr val="2A63E8"/>
+                </a:solidFill>
+                <a:latin typeface="Helvetica Neue"/>
+                <a:hlinkClick r:id="rId4"/>
+                <a:ea typeface="PingFang SC"/>
+              </a:rPr>
+              <a:t>https://query2.finance.yahoo.com/v8/finance/chart/BTC-USD?period1=1625443200&amp;period2=1783296000&amp;interval=1d&amp;events=history</a:t>
+            </a:r>
+            <a:r>
+              <a:rPr sz="1050" b="0">
+                <a:solidFill>
+                  <a:srgbClr val="5B6B81"/>
+                </a:solidFill>
+                <a:latin typeface="Helvetica Neue"/>
+                <a:ea typeface="PingFang SC"/>
+              </a:rPr>
+              <a:t>（2026-07-05T08:16:06+00:00）</a:t>
             </a:r>
           </a:p>
         </p:txBody>
